--- a/models_representation.pptx
+++ b/models_representation.pptx
@@ -218,7 +218,7 @@
           <a:p>
             <a:fld id="{53A7101E-77CC-774B-8B89-8BCF5404A3E1}" type="datetimeFigureOut">
               <a:rPr lang="it-IT" smtClean="0"/>
-              <a:t>17/09/24</a:t>
+              <a:t>28/10/24</a:t>
             </a:fld>
             <a:endParaRPr lang="it-IT"/>
           </a:p>
@@ -716,7 +716,7 @@
           <a:p>
             <a:fld id="{945283D2-C903-3141-AE1B-7D2BA63A2436}" type="datetimeFigureOut">
               <a:rPr lang="it-IT" smtClean="0"/>
-              <a:t>17/09/24</a:t>
+              <a:t>28/10/24</a:t>
             </a:fld>
             <a:endParaRPr lang="it-IT"/>
           </a:p>
@@ -914,7 +914,7 @@
           <a:p>
             <a:fld id="{945283D2-C903-3141-AE1B-7D2BA63A2436}" type="datetimeFigureOut">
               <a:rPr lang="it-IT" smtClean="0"/>
-              <a:t>17/09/24</a:t>
+              <a:t>28/10/24</a:t>
             </a:fld>
             <a:endParaRPr lang="it-IT"/>
           </a:p>
@@ -1122,7 +1122,7 @@
           <a:p>
             <a:fld id="{945283D2-C903-3141-AE1B-7D2BA63A2436}" type="datetimeFigureOut">
               <a:rPr lang="it-IT" smtClean="0"/>
-              <a:t>17/09/24</a:t>
+              <a:t>28/10/24</a:t>
             </a:fld>
             <a:endParaRPr lang="it-IT"/>
           </a:p>
@@ -1320,7 +1320,7 @@
           <a:p>
             <a:fld id="{945283D2-C903-3141-AE1B-7D2BA63A2436}" type="datetimeFigureOut">
               <a:rPr lang="it-IT" smtClean="0"/>
-              <a:t>17/09/24</a:t>
+              <a:t>28/10/24</a:t>
             </a:fld>
             <a:endParaRPr lang="it-IT"/>
           </a:p>
@@ -1595,7 +1595,7 @@
           <a:p>
             <a:fld id="{945283D2-C903-3141-AE1B-7D2BA63A2436}" type="datetimeFigureOut">
               <a:rPr lang="it-IT" smtClean="0"/>
-              <a:t>17/09/24</a:t>
+              <a:t>28/10/24</a:t>
             </a:fld>
             <a:endParaRPr lang="it-IT"/>
           </a:p>
@@ -1860,7 +1860,7 @@
           <a:p>
             <a:fld id="{945283D2-C903-3141-AE1B-7D2BA63A2436}" type="datetimeFigureOut">
               <a:rPr lang="it-IT" smtClean="0"/>
-              <a:t>17/09/24</a:t>
+              <a:t>28/10/24</a:t>
             </a:fld>
             <a:endParaRPr lang="it-IT"/>
           </a:p>
@@ -2272,7 +2272,7 @@
           <a:p>
             <a:fld id="{945283D2-C903-3141-AE1B-7D2BA63A2436}" type="datetimeFigureOut">
               <a:rPr lang="it-IT" smtClean="0"/>
-              <a:t>17/09/24</a:t>
+              <a:t>28/10/24</a:t>
             </a:fld>
             <a:endParaRPr lang="it-IT"/>
           </a:p>
@@ -2413,7 +2413,7 @@
           <a:p>
             <a:fld id="{945283D2-C903-3141-AE1B-7D2BA63A2436}" type="datetimeFigureOut">
               <a:rPr lang="it-IT" smtClean="0"/>
-              <a:t>17/09/24</a:t>
+              <a:t>28/10/24</a:t>
             </a:fld>
             <a:endParaRPr lang="it-IT"/>
           </a:p>
@@ -2526,7 +2526,7 @@
           <a:p>
             <a:fld id="{945283D2-C903-3141-AE1B-7D2BA63A2436}" type="datetimeFigureOut">
               <a:rPr lang="it-IT" smtClean="0"/>
-              <a:t>17/09/24</a:t>
+              <a:t>28/10/24</a:t>
             </a:fld>
             <a:endParaRPr lang="it-IT"/>
           </a:p>
@@ -2837,7 +2837,7 @@
           <a:p>
             <a:fld id="{945283D2-C903-3141-AE1B-7D2BA63A2436}" type="datetimeFigureOut">
               <a:rPr lang="it-IT" smtClean="0"/>
-              <a:t>17/09/24</a:t>
+              <a:t>28/10/24</a:t>
             </a:fld>
             <a:endParaRPr lang="it-IT"/>
           </a:p>
@@ -3125,7 +3125,7 @@
           <a:p>
             <a:fld id="{945283D2-C903-3141-AE1B-7D2BA63A2436}" type="datetimeFigureOut">
               <a:rPr lang="it-IT" smtClean="0"/>
-              <a:t>17/09/24</a:t>
+              <a:t>28/10/24</a:t>
             </a:fld>
             <a:endParaRPr lang="it-IT"/>
           </a:p>
@@ -3366,7 +3366,7 @@
           <a:p>
             <a:fld id="{945283D2-C903-3141-AE1B-7D2BA63A2436}" type="datetimeFigureOut">
               <a:rPr lang="it-IT" smtClean="0"/>
-              <a:t>17/09/24</a:t>
+              <a:t>28/10/24</a:t>
             </a:fld>
             <a:endParaRPr lang="it-IT"/>
           </a:p>
@@ -23628,18 +23628,18 @@
           <p:cNvCxnSpPr>
             <a:cxnSpLocks/>
             <a:stCxn id="65" idx="3"/>
-            <a:endCxn id="274" idx="3"/>
+            <a:endCxn id="276" idx="2"/>
           </p:cNvCxnSpPr>
           <p:nvPr/>
         </p:nvCxnSpPr>
         <p:spPr>
           <a:xfrm rot="16200000" flipH="1">
-            <a:off x="4929106" y="873017"/>
-            <a:ext cx="355543" cy="6342478"/>
+            <a:off x="4857341" y="944781"/>
+            <a:ext cx="13789" cy="5857195"/>
           </a:xfrm>
           <a:prstGeom prst="bentConnector3">
             <a:avLst>
-              <a:gd name="adj1" fmla="val 397481"/>
+              <a:gd name="adj1" fmla="val 10475488"/>
             </a:avLst>
           </a:prstGeom>
           <a:ln>
